--- a/onboarding/presentaciones/ONB07_Como_recorrer_AT_WORK.pptx
+++ b/onboarding/presentaciones/ONB07_Como_recorrer_AT_WORK.pptx
@@ -696,10 +696,11 @@
               <a:rPr lang="en-US" dirty="0"/>
               <a:t>Como guía general, este va a ser tu ritmo de referencia.
 La primera semana es para instalar el sistema y completar el onboarding.
-Después vamos a poner el foco en Activate Your English, porque primero necesitas aprender a convertir situaciones reales en práctica útil.
-Luego vamos a pasar a Communicate in Real Time, donde entrenamos cómo organizar, responder, recuperar el hilo, ir al punto y seguir comunicándote cuando no puedes depender de un guion.
-Más adelante vamos a dedicar un bloque más sistemático a Polish Your English, para trabajar los patrones de precisión que venimos detectando.
-Y hacia el final vamos a integrar, reforzar áreas pendientes y mirar el proceso completo antes del review final.
+De la semana 2 a la 4 vamos a poner el foco en Activate Your English, porque primero necesitas aprender a convertir situaciones reales en práctica útil y activar el inglés que ya tienes.
+De la semana 5 a la 10 vamos a pasar a Communicate in Real Time, donde entrenamos cómo organizar, responder, recuperar el hilo, ir al punto y seguir comunicándote cuando no puedes depender de un guion.
+De la semana 11 a la 16 vamos a dedicar un bloque más sistemático a Polish Your English, para estabilizar los patrones de precisión que venimos detectando.
+De la semana 17 a la 19 el foco principal va a ser Understand &amp; Be Understood: entender mejor el inglés hablado y hacerte entender con más facilidad.
+Y en la semana 20 hacemos el review final e integración: comparamos con tu Starting Point, miramos el proceso completo y definimos tu siguiente nivel.
 Pero esto es una guía de foco, no una cárcel curricular.</a:t>
             </a:r>
             <a:endParaRPr lang="en-US" dirty="0"/>
@@ -3244,11 +3245,11 @@
         <p:spPr>
           <a:xfrm>
             <a:off x="4389120" y="1280160"/>
-            <a:ext cx="7159752" cy="868680"/>
+            <a:ext cx="7159752" cy="693420"/>
           </a:xfrm>
           <a:prstGeom prst="roundRect">
             <a:avLst>
-              <a:gd name="adj" fmla="val 16842"/>
+              <a:gd name="adj" fmla="val 21099"/>
             </a:avLst>
           </a:prstGeom>
           <a:solidFill>
@@ -3277,8 +3278,8 @@
         </p:nvSpPr>
         <p:spPr>
           <a:xfrm>
-            <a:off x="4663440" y="1440180"/>
-            <a:ext cx="548640" cy="548640"/>
+            <a:off x="4663440" y="1394460"/>
+            <a:ext cx="464820" cy="464820"/>
           </a:xfrm>
           <a:prstGeom prst="ellipse">
             <a:avLst/>
@@ -3302,8 +3303,8 @@
         </p:nvSpPr>
         <p:spPr>
           <a:xfrm>
-            <a:off x="4663440" y="1440180"/>
-            <a:ext cx="548640" cy="548640"/>
+            <a:off x="4663440" y="1394460"/>
+            <a:ext cx="464820" cy="464820"/>
           </a:xfrm>
           <a:prstGeom prst="rect">
             <a:avLst/>
@@ -3319,7 +3320,7 @@
               <a:buNone/>
             </a:pPr>
             <a:r>
-              <a:rPr lang="en-US" sz="1680" b="1" dirty="0">
+              <a:rPr lang="en-US" sz="1423" b="1" dirty="0">
                 <a:solidFill>
                   <a:srgbClr val="FFFDF9"/>
                 </a:solidFill>
@@ -3329,7 +3330,7 @@
               </a:rPr>
               <a:t>1</a:t>
             </a:r>
-            <a:endParaRPr lang="en-US" sz="1680" dirty="0"/>
+            <a:endParaRPr lang="en-US" sz="1423" dirty="0"/>
           </a:p>
         </p:txBody>
       </p:sp>
@@ -3341,8 +3342,8 @@
         </p:nvSpPr>
         <p:spPr>
           <a:xfrm>
-            <a:off x="5486400" y="1280160"/>
-            <a:ext cx="5742432" cy="868680"/>
+            <a:off x="5402580" y="1280160"/>
+            <a:ext cx="5826252" cy="693420"/>
           </a:xfrm>
           <a:prstGeom prst="rect">
             <a:avLst/>
@@ -3361,7 +3362,7 @@
               <a:buNone/>
             </a:pPr>
             <a:r>
-              <a:rPr lang="en-US" sz="1550" b="1" dirty="0">
+              <a:rPr lang="en-US" sz="1450" b="1" dirty="0">
                 <a:solidFill>
                   <a:srgbClr val="3F1E0D"/>
                 </a:solidFill>
@@ -3369,9 +3370,9 @@
                 <a:ea typeface="Open Sans" pitchFamily="34" charset="-122"/>
                 <a:cs typeface="Open Sans" pitchFamily="34" charset="-120"/>
               </a:rPr>
-              <a:t>Semana 1</a:t>
-            </a:r>
-            <a:endParaRPr lang="en-US" sz="1550" dirty="0"/>
+              <a:t>Semana 1 · Onboarding</a:t>
+            </a:r>
+            <a:endParaRPr lang="en-US" sz="1450" dirty="0"/>
           </a:p>
           <a:p>
             <a:pPr indent="0" marL="0">
@@ -3381,7 +3382,7 @@
               <a:buNone/>
             </a:pPr>
             <a:r>
-              <a:rPr lang="en-US" sz="1250" dirty="0">
+              <a:rPr lang="en-US" sz="1150" dirty="0">
                 <a:solidFill>
                   <a:srgbClr val="8A6A55"/>
                 </a:solidFill>
@@ -3389,9 +3390,9 @@
                 <a:ea typeface="Open Sans" pitchFamily="34" charset="-122"/>
                 <a:cs typeface="Open Sans" pitchFamily="34" charset="-120"/>
               </a:rPr>
-              <a:t>Instalar el sistema y completar el onboarding</a:t>
-            </a:r>
-            <a:endParaRPr lang="en-US" sz="1550" dirty="0"/>
+              <a:t>Tu sistema de trabajo queda instalado</a:t>
+            </a:r>
+            <a:endParaRPr lang="en-US" sz="1450" dirty="0"/>
           </a:p>
         </p:txBody>
       </p:sp>
@@ -3403,12 +3404,12 @@
         </p:nvSpPr>
         <p:spPr>
           <a:xfrm>
-            <a:off x="4389120" y="2331720"/>
-            <a:ext cx="7159752" cy="868680"/>
+            <a:off x="4389120" y="2156460"/>
+            <a:ext cx="7159752" cy="693420"/>
           </a:xfrm>
           <a:prstGeom prst="roundRect">
             <a:avLst>
-              <a:gd name="adj" fmla="val 16842"/>
+              <a:gd name="adj" fmla="val 21099"/>
             </a:avLst>
           </a:prstGeom>
           <a:solidFill>
@@ -3437,8 +3438,8 @@
         </p:nvSpPr>
         <p:spPr>
           <a:xfrm>
-            <a:off x="4663440" y="2491740"/>
-            <a:ext cx="548640" cy="548640"/>
+            <a:off x="4663440" y="2270760"/>
+            <a:ext cx="464820" cy="464820"/>
           </a:xfrm>
           <a:prstGeom prst="ellipse">
             <a:avLst/>
@@ -3462,8 +3463,8 @@
         </p:nvSpPr>
         <p:spPr>
           <a:xfrm>
-            <a:off x="4663440" y="2491740"/>
-            <a:ext cx="548640" cy="548640"/>
+            <a:off x="4663440" y="2270760"/>
+            <a:ext cx="464820" cy="464820"/>
           </a:xfrm>
           <a:prstGeom prst="rect">
             <a:avLst/>
@@ -3479,7 +3480,7 @@
               <a:buNone/>
             </a:pPr>
             <a:r>
-              <a:rPr lang="en-US" sz="1680" b="1" dirty="0">
+              <a:rPr lang="en-US" sz="1423" b="1" dirty="0">
                 <a:solidFill>
                   <a:srgbClr val="FFFDF9"/>
                 </a:solidFill>
@@ -3489,7 +3490,7 @@
               </a:rPr>
               <a:t>2</a:t>
             </a:r>
-            <a:endParaRPr lang="en-US" sz="1680" dirty="0"/>
+            <a:endParaRPr lang="en-US" sz="1423" dirty="0"/>
           </a:p>
         </p:txBody>
       </p:sp>
@@ -3501,8 +3502,8 @@
         </p:nvSpPr>
         <p:spPr>
           <a:xfrm>
-            <a:off x="5486400" y="2331720"/>
-            <a:ext cx="5742432" cy="868680"/>
+            <a:off x="5402580" y="2156460"/>
+            <a:ext cx="5826252" cy="693420"/>
           </a:xfrm>
           <a:prstGeom prst="rect">
             <a:avLst/>
@@ -3521,7 +3522,7 @@
               <a:buNone/>
             </a:pPr>
             <a:r>
-              <a:rPr lang="en-US" sz="1550" b="1" dirty="0">
+              <a:rPr lang="en-US" sz="1450" b="1" dirty="0">
                 <a:solidFill>
                   <a:srgbClr val="3F1E0D"/>
                 </a:solidFill>
@@ -3529,9 +3530,9 @@
                 <a:ea typeface="Open Sans" pitchFamily="34" charset="-122"/>
                 <a:cs typeface="Open Sans" pitchFamily="34" charset="-120"/>
               </a:rPr>
-              <a:t>Activate Your English</a:t>
-            </a:r>
-            <a:endParaRPr lang="en-US" sz="1550" dirty="0"/>
+              <a:t>Semanas 2–4 · Activate Your English</a:t>
+            </a:r>
+            <a:endParaRPr lang="en-US" sz="1450" dirty="0"/>
           </a:p>
           <a:p>
             <a:pPr indent="0" marL="0">
@@ -3541,7 +3542,7 @@
               <a:buNone/>
             </a:pPr>
             <a:r>
-              <a:rPr lang="en-US" sz="1250" dirty="0">
+              <a:rPr lang="en-US" sz="1150" dirty="0">
                 <a:solidFill>
                   <a:srgbClr val="8A6A55"/>
                 </a:solidFill>
@@ -3549,9 +3550,9 @@
                 <a:ea typeface="Open Sans" pitchFamily="34" charset="-122"/>
                 <a:cs typeface="Open Sans" pitchFamily="34" charset="-120"/>
               </a:rPr>
-              <a:t>Convertir situaciones reales en práctica útil</a:t>
-            </a:r>
-            <a:endParaRPr lang="en-US" sz="1550" dirty="0"/>
+              <a:t>Conviertes situaciones reales en práctica y activas el inglés que ya tienes</a:t>
+            </a:r>
+            <a:endParaRPr lang="en-US" sz="1450" dirty="0"/>
           </a:p>
         </p:txBody>
       </p:sp>
@@ -3563,12 +3564,12 @@
         </p:nvSpPr>
         <p:spPr>
           <a:xfrm>
-            <a:off x="4389120" y="3383280"/>
-            <a:ext cx="7159752" cy="868680"/>
+            <a:off x="4389120" y="3032760"/>
+            <a:ext cx="7159752" cy="693420"/>
           </a:xfrm>
           <a:prstGeom prst="roundRect">
             <a:avLst>
-              <a:gd name="adj" fmla="val 16842"/>
+              <a:gd name="adj" fmla="val 21099"/>
             </a:avLst>
           </a:prstGeom>
           <a:solidFill>
@@ -3597,8 +3598,8 @@
         </p:nvSpPr>
         <p:spPr>
           <a:xfrm>
-            <a:off x="4663440" y="3543300"/>
-            <a:ext cx="548640" cy="548640"/>
+            <a:off x="4663440" y="3147060"/>
+            <a:ext cx="464820" cy="464820"/>
           </a:xfrm>
           <a:prstGeom prst="ellipse">
             <a:avLst/>
@@ -3622,8 +3623,8 @@
         </p:nvSpPr>
         <p:spPr>
           <a:xfrm>
-            <a:off x="4663440" y="3543300"/>
-            <a:ext cx="548640" cy="548640"/>
+            <a:off x="4663440" y="3147060"/>
+            <a:ext cx="464820" cy="464820"/>
           </a:xfrm>
           <a:prstGeom prst="rect">
             <a:avLst/>
@@ -3639,7 +3640,7 @@
               <a:buNone/>
             </a:pPr>
             <a:r>
-              <a:rPr lang="en-US" sz="1680" b="1" dirty="0">
+              <a:rPr lang="en-US" sz="1423" b="1" dirty="0">
                 <a:solidFill>
                   <a:srgbClr val="FFFDF9"/>
                 </a:solidFill>
@@ -3649,7 +3650,7 @@
               </a:rPr>
               <a:t>3</a:t>
             </a:r>
-            <a:endParaRPr lang="en-US" sz="1680" dirty="0"/>
+            <a:endParaRPr lang="en-US" sz="1423" dirty="0"/>
           </a:p>
         </p:txBody>
       </p:sp>
@@ -3661,8 +3662,8 @@
         </p:nvSpPr>
         <p:spPr>
           <a:xfrm>
-            <a:off x="5486400" y="3383280"/>
-            <a:ext cx="5742432" cy="868680"/>
+            <a:off x="5402580" y="3032760"/>
+            <a:ext cx="5826252" cy="693420"/>
           </a:xfrm>
           <a:prstGeom prst="rect">
             <a:avLst/>
@@ -3681,7 +3682,7 @@
               <a:buNone/>
             </a:pPr>
             <a:r>
-              <a:rPr lang="en-US" sz="1550" b="1" dirty="0">
+              <a:rPr lang="en-US" sz="1450" b="1" dirty="0">
                 <a:solidFill>
                   <a:srgbClr val="3F1E0D"/>
                 </a:solidFill>
@@ -3689,9 +3690,9 @@
                 <a:ea typeface="Open Sans" pitchFamily="34" charset="-122"/>
                 <a:cs typeface="Open Sans" pitchFamily="34" charset="-120"/>
               </a:rPr>
-              <a:t>Communicate in Real Time</a:t>
-            </a:r>
-            <a:endParaRPr lang="en-US" sz="1550" dirty="0"/>
+              <a:t>Semanas 5–10 · Communicate in Real Time</a:t>
+            </a:r>
+            <a:endParaRPr lang="en-US" sz="1450" dirty="0"/>
           </a:p>
           <a:p>
             <a:pPr indent="0" marL="0">
@@ -3701,7 +3702,7 @@
               <a:buNone/>
             </a:pPr>
             <a:r>
-              <a:rPr lang="en-US" sz="1250" dirty="0">
+              <a:rPr lang="en-US" sz="1150" dirty="0">
                 <a:solidFill>
                   <a:srgbClr val="8A6A55"/>
                 </a:solidFill>
@@ -3709,9 +3710,9 @@
                 <a:ea typeface="Open Sans" pitchFamily="34" charset="-122"/>
                 <a:cs typeface="Open Sans" pitchFamily="34" charset="-120"/>
               </a:rPr>
-              <a:t>Organizar, responder, recuperar el hilo e ir al punto sin depender de un guion</a:t>
-            </a:r>
-            <a:endParaRPr lang="en-US" sz="1550" dirty="0"/>
+              <a:t>Organizas y sostienes mensajes claros en tiempo real, sin depender de un guion</a:t>
+            </a:r>
+            <a:endParaRPr lang="en-US" sz="1450" dirty="0"/>
           </a:p>
         </p:txBody>
       </p:sp>
@@ -3723,12 +3724,12 @@
         </p:nvSpPr>
         <p:spPr>
           <a:xfrm>
-            <a:off x="4389120" y="4434840"/>
-            <a:ext cx="7159752" cy="868680"/>
+            <a:off x="4389120" y="3909060"/>
+            <a:ext cx="7159752" cy="693420"/>
           </a:xfrm>
           <a:prstGeom prst="roundRect">
             <a:avLst>
-              <a:gd name="adj" fmla="val 16842"/>
+              <a:gd name="adj" fmla="val 21099"/>
             </a:avLst>
           </a:prstGeom>
           <a:solidFill>
@@ -3757,8 +3758,8 @@
         </p:nvSpPr>
         <p:spPr>
           <a:xfrm>
-            <a:off x="4663440" y="4594860"/>
-            <a:ext cx="548640" cy="548640"/>
+            <a:off x="4663440" y="4023360"/>
+            <a:ext cx="464820" cy="464820"/>
           </a:xfrm>
           <a:prstGeom prst="ellipse">
             <a:avLst/>
@@ -3782,8 +3783,8 @@
         </p:nvSpPr>
         <p:spPr>
           <a:xfrm>
-            <a:off x="4663440" y="4594860"/>
-            <a:ext cx="548640" cy="548640"/>
+            <a:off x="4663440" y="4023360"/>
+            <a:ext cx="464820" cy="464820"/>
           </a:xfrm>
           <a:prstGeom prst="rect">
             <a:avLst/>
@@ -3799,7 +3800,7 @@
               <a:buNone/>
             </a:pPr>
             <a:r>
-              <a:rPr lang="en-US" sz="1680" b="1" dirty="0">
+              <a:rPr lang="en-US" sz="1423" b="1" dirty="0">
                 <a:solidFill>
                   <a:srgbClr val="FFFDF9"/>
                 </a:solidFill>
@@ -3809,7 +3810,7 @@
               </a:rPr>
               <a:t>4</a:t>
             </a:r>
-            <a:endParaRPr lang="en-US" sz="1680" dirty="0"/>
+            <a:endParaRPr lang="en-US" sz="1423" dirty="0"/>
           </a:p>
         </p:txBody>
       </p:sp>
@@ -3821,8 +3822,8 @@
         </p:nvSpPr>
         <p:spPr>
           <a:xfrm>
-            <a:off x="5486400" y="4434840"/>
-            <a:ext cx="5742432" cy="868680"/>
+            <a:off x="5402580" y="3909060"/>
+            <a:ext cx="5826252" cy="693420"/>
           </a:xfrm>
           <a:prstGeom prst="rect">
             <a:avLst/>
@@ -3841,7 +3842,7 @@
               <a:buNone/>
             </a:pPr>
             <a:r>
-              <a:rPr lang="en-US" sz="1550" b="1" dirty="0">
+              <a:rPr lang="en-US" sz="1450" b="1" dirty="0">
                 <a:solidFill>
                   <a:srgbClr val="3F1E0D"/>
                 </a:solidFill>
@@ -3849,9 +3850,9 @@
                 <a:ea typeface="Open Sans" pitchFamily="34" charset="-122"/>
                 <a:cs typeface="Open Sans" pitchFamily="34" charset="-120"/>
               </a:rPr>
-              <a:t>Polish Your English</a:t>
-            </a:r>
-            <a:endParaRPr lang="en-US" sz="1550" dirty="0"/>
+              <a:t>Semanas 11–16 · Polish Your English</a:t>
+            </a:r>
+            <a:endParaRPr lang="en-US" sz="1450" dirty="0"/>
           </a:p>
           <a:p>
             <a:pPr indent="0" marL="0">
@@ -3861,7 +3862,7 @@
               <a:buNone/>
             </a:pPr>
             <a:r>
-              <a:rPr lang="en-US" sz="1250" dirty="0">
+              <a:rPr lang="en-US" sz="1150" dirty="0">
                 <a:solidFill>
                   <a:srgbClr val="8A6A55"/>
                 </a:solidFill>
@@ -3869,9 +3870,9 @@
                 <a:ea typeface="Open Sans" pitchFamily="34" charset="-122"/>
                 <a:cs typeface="Open Sans" pitchFamily="34" charset="-120"/>
               </a:rPr>
-              <a:t>Trabajar los patrones de precisión que venimos detectando</a:t>
-            </a:r>
-            <a:endParaRPr lang="en-US" sz="1550" dirty="0"/>
+              <a:t>Estabilizas los patrones que limitan tu claridad y precisión</a:t>
+            </a:r>
+            <a:endParaRPr lang="en-US" sz="1450" dirty="0"/>
           </a:p>
         </p:txBody>
       </p:sp>
@@ -3883,12 +3884,12 @@
         </p:nvSpPr>
         <p:spPr>
           <a:xfrm>
-            <a:off x="4389120" y="5486400"/>
-            <a:ext cx="7159752" cy="868680"/>
+            <a:off x="4389120" y="4785360"/>
+            <a:ext cx="7159752" cy="693420"/>
           </a:xfrm>
           <a:prstGeom prst="roundRect">
             <a:avLst>
-              <a:gd name="adj" fmla="val 16842"/>
+              <a:gd name="adj" fmla="val 21099"/>
             </a:avLst>
           </a:prstGeom>
           <a:solidFill>
@@ -3917,8 +3918,8 @@
         </p:nvSpPr>
         <p:spPr>
           <a:xfrm>
-            <a:off x="4663440" y="5646420"/>
-            <a:ext cx="548640" cy="548640"/>
+            <a:off x="4663440" y="4899660"/>
+            <a:ext cx="464820" cy="464820"/>
           </a:xfrm>
           <a:prstGeom prst="ellipse">
             <a:avLst/>
@@ -3942,8 +3943,8 @@
         </p:nvSpPr>
         <p:spPr>
           <a:xfrm>
-            <a:off x="4663440" y="5646420"/>
-            <a:ext cx="548640" cy="548640"/>
+            <a:off x="4663440" y="4899660"/>
+            <a:ext cx="464820" cy="464820"/>
           </a:xfrm>
           <a:prstGeom prst="rect">
             <a:avLst/>
@@ -3959,7 +3960,7 @@
               <a:buNone/>
             </a:pPr>
             <a:r>
-              <a:rPr lang="en-US" sz="1680" b="1" dirty="0">
+              <a:rPr lang="en-US" sz="1423" b="1" dirty="0">
                 <a:solidFill>
                   <a:srgbClr val="FFFDF9"/>
                 </a:solidFill>
@@ -3969,7 +3970,7 @@
               </a:rPr>
               <a:t>5</a:t>
             </a:r>
-            <a:endParaRPr lang="en-US" sz="1680" dirty="0"/>
+            <a:endParaRPr lang="en-US" sz="1423" dirty="0"/>
           </a:p>
         </p:txBody>
       </p:sp>
@@ -3981,8 +3982,8 @@
         </p:nvSpPr>
         <p:spPr>
           <a:xfrm>
-            <a:off x="5486400" y="5486400"/>
-            <a:ext cx="5742432" cy="868680"/>
+            <a:off x="5402580" y="4785360"/>
+            <a:ext cx="5826252" cy="693420"/>
           </a:xfrm>
           <a:prstGeom prst="rect">
             <a:avLst/>
@@ -4001,7 +4002,7 @@
               <a:buNone/>
             </a:pPr>
             <a:r>
-              <a:rPr lang="en-US" sz="1550" b="1" dirty="0">
+              <a:rPr lang="en-US" sz="1450" b="1" dirty="0">
                 <a:solidFill>
                   <a:srgbClr val="3F1E0D"/>
                 </a:solidFill>
@@ -4009,9 +4010,9 @@
                 <a:ea typeface="Open Sans" pitchFamily="34" charset="-122"/>
                 <a:cs typeface="Open Sans" pitchFamily="34" charset="-120"/>
               </a:rPr>
-              <a:t>Cierre</a:t>
-            </a:r>
-            <a:endParaRPr lang="en-US" sz="1550" dirty="0"/>
+              <a:t>Semanas 17–19 · Understand &amp; Be Understood</a:t>
+            </a:r>
+            <a:endParaRPr lang="en-US" sz="1450" dirty="0"/>
           </a:p>
           <a:p>
             <a:pPr indent="0" marL="0">
@@ -4021,7 +4022,7 @@
               <a:buNone/>
             </a:pPr>
             <a:r>
-              <a:rPr lang="en-US" sz="1250" dirty="0">
+              <a:rPr lang="en-US" sz="1150" dirty="0">
                 <a:solidFill>
                   <a:srgbClr val="8A6A55"/>
                 </a:solidFill>
@@ -4029,9 +4030,169 @@
                 <a:ea typeface="Open Sans" pitchFamily="34" charset="-122"/>
                 <a:cs typeface="Open Sans" pitchFamily="34" charset="-120"/>
               </a:rPr>
-              <a:t>Integrar, reforzar áreas pendientes y mirar el proceso completo antes del review final</a:t>
-            </a:r>
-            <a:endParaRPr lang="en-US" sz="1550" dirty="0"/>
+              <a:t>Entiendes mejor el inglés hablado y te haces entender con más facilidad</a:t>
+            </a:r>
+            <a:endParaRPr lang="en-US" sz="1450" dirty="0"/>
+          </a:p>
+        </p:txBody>
+      </p:sp>
+      <p:sp>
+        <p:nvSpPr>
+          <p:cNvPr id="27" name="Shape 23"/>
+          <p:cNvSpPr/>
+          <p:nvPr/>
+        </p:nvSpPr>
+        <p:spPr>
+          <a:xfrm>
+            <a:off x="4389120" y="5661660"/>
+            <a:ext cx="7159752" cy="693420"/>
+          </a:xfrm>
+          <a:prstGeom prst="roundRect">
+            <a:avLst>
+              <a:gd name="adj" fmla="val 21099"/>
+            </a:avLst>
+          </a:prstGeom>
+          <a:solidFill>
+            <a:srgbClr val="FFFDF9"/>
+          </a:solidFill>
+          <a:ln w="12700">
+            <a:solidFill>
+              <a:srgbClr val="FFFDF9"/>
+            </a:solidFill>
+            <a:prstDash val="solid"/>
+          </a:ln>
+          <a:effectLst>
+            <a:outerShdw sx="100000" sy="100000" kx="0" ky="0" algn="bl" rotWithShape="0" blurRad="177800" dist="38100" dir="5400000">
+              <a:srgbClr val="3F1E0D">
+                <a:alpha val="10000"/>
+              </a:srgbClr>
+            </a:outerShdw>
+          </a:effectLst>
+        </p:spPr>
+      </p:sp>
+      <p:sp>
+        <p:nvSpPr>
+          <p:cNvPr id="28" name="Shape 24"/>
+          <p:cNvSpPr/>
+          <p:nvPr/>
+        </p:nvSpPr>
+        <p:spPr>
+          <a:xfrm>
+            <a:off x="4663440" y="5775960"/>
+            <a:ext cx="464820" cy="464820"/>
+          </a:xfrm>
+          <a:prstGeom prst="ellipse">
+            <a:avLst/>
+          </a:prstGeom>
+          <a:solidFill>
+            <a:srgbClr val="C68C6C"/>
+          </a:solidFill>
+          <a:ln w="12700">
+            <a:solidFill>
+              <a:srgbClr val="C68C6C"/>
+            </a:solidFill>
+            <a:prstDash val="solid"/>
+          </a:ln>
+        </p:spPr>
+      </p:sp>
+      <p:sp>
+        <p:nvSpPr>
+          <p:cNvPr id="29" name="Text 25"/>
+          <p:cNvSpPr txBox="1"/>
+          <p:nvPr/>
+        </p:nvSpPr>
+        <p:spPr>
+          <a:xfrm>
+            <a:off x="4663440" y="5775960"/>
+            <a:ext cx="464820" cy="464820"/>
+          </a:xfrm>
+          <a:prstGeom prst="rect">
+            <a:avLst/>
+          </a:prstGeom>
+          <a:noFill/>
+          <a:ln/>
+        </p:spPr>
+        <p:txBody>
+          <a:bodyPr wrap="square" lIns="0" tIns="0" rIns="0" bIns="0" rtlCol="0" anchor="ctr"/>
+          <a:lstStyle/>
+          <a:p>
+            <a:pPr algn="ctr" indent="0" marL="0">
+              <a:buNone/>
+            </a:pPr>
+            <a:r>
+              <a:rPr lang="en-US" sz="1423" b="1" dirty="0">
+                <a:solidFill>
+                  <a:srgbClr val="FFFDF9"/>
+                </a:solidFill>
+                <a:latin typeface="Source Serif Pro" pitchFamily="34" charset="0"/>
+                <a:ea typeface="Source Serif Pro" pitchFamily="34" charset="-122"/>
+                <a:cs typeface="Source Serif Pro" pitchFamily="34" charset="-120"/>
+              </a:rPr>
+              <a:t>6</a:t>
+            </a:r>
+            <a:endParaRPr lang="en-US" sz="1423" dirty="0"/>
+          </a:p>
+        </p:txBody>
+      </p:sp>
+      <p:sp>
+        <p:nvSpPr>
+          <p:cNvPr id="30" name="Text 26"/>
+          <p:cNvSpPr txBox="1"/>
+          <p:nvPr/>
+        </p:nvSpPr>
+        <p:spPr>
+          <a:xfrm>
+            <a:off x="5402580" y="5661660"/>
+            <a:ext cx="5826252" cy="693420"/>
+          </a:xfrm>
+          <a:prstGeom prst="rect">
+            <a:avLst/>
+          </a:prstGeom>
+          <a:noFill/>
+          <a:ln/>
+        </p:spPr>
+        <p:txBody>
+          <a:bodyPr wrap="square" lIns="0" tIns="0" rIns="0" bIns="0" rtlCol="0" anchor="ctr"/>
+          <a:lstStyle/>
+          <a:p>
+            <a:pPr indent="0" marL="0">
+              <a:spcAft>
+                <a:spcPts val="200"/>
+              </a:spcAft>
+              <a:buNone/>
+            </a:pPr>
+            <a:r>
+              <a:rPr lang="en-US" sz="1450" b="1" dirty="0">
+                <a:solidFill>
+                  <a:srgbClr val="3F1E0D"/>
+                </a:solidFill>
+                <a:latin typeface="Open Sans" pitchFamily="34" charset="0"/>
+                <a:ea typeface="Open Sans" pitchFamily="34" charset="-122"/>
+                <a:cs typeface="Open Sans" pitchFamily="34" charset="-120"/>
+              </a:rPr>
+              <a:t>Semana 20 · Review final e integración</a:t>
+            </a:r>
+            <a:endParaRPr lang="en-US" sz="1450" dirty="0"/>
+          </a:p>
+          <a:p>
+            <a:pPr indent="0" marL="0">
+              <a:spcAft>
+                <a:spcPts val="200"/>
+              </a:spcAft>
+              <a:buNone/>
+            </a:pPr>
+            <a:r>
+              <a:rPr lang="en-US" sz="1150" dirty="0">
+                <a:solidFill>
+                  <a:srgbClr val="8A6A55"/>
+                </a:solidFill>
+                <a:latin typeface="Open Sans" pitchFamily="34" charset="0"/>
+                <a:ea typeface="Open Sans" pitchFamily="34" charset="-122"/>
+                <a:cs typeface="Open Sans" pitchFamily="34" charset="-120"/>
+              </a:rPr>
+              <a:t>Integras todo, comparas con tu Starting Point y defines tu siguiente nivel</a:t>
+            </a:r>
+            <a:endParaRPr lang="en-US" sz="1450" dirty="0"/>
           </a:p>
         </p:txBody>
       </p:sp>

--- a/onboarding/presentaciones/ONB07_Como_recorrer_AT_WORK.pptx
+++ b/onboarding/presentaciones/ONB07_Como_recorrer_AT_WORK.pptx
@@ -4170,7 +4170,7 @@
                 <a:ea typeface="Open Sans" pitchFamily="34" charset="-122"/>
                 <a:cs typeface="Open Sans" pitchFamily="34" charset="-120"/>
               </a:rPr>
-              <a:t>Semana 20 · Review final e integración</a:t>
+              <a:t>Semana 20 · Review final / integración</a:t>
             </a:r>
             <a:endParaRPr lang="en-US" sz="1450" dirty="0"/>
           </a:p>
